--- a/DevOps/Theory/Lectures/Week3(Virtualization_and_Linux.pptx
+++ b/DevOps/Theory/Lectures/Week3(Virtualization_and_Linux.pptx
@@ -142,6 +142,11 @@
       </a:defRPr>
     </a:lvl9pPr>
   </p:defaultTextStyle>
+  <p:extLst>
+    <p:ext uri="{EFAFB233-063F-42B5-8137-9DF3F51BA10A}">
+      <p15:sldGuideLst xmlns:p15="http://schemas.microsoft.com/office/powerpoint/2012/main"/>
+    </p:ext>
+  </p:extLst>
 </p:presentation>
 </file>
 
@@ -4853,7 +4858,13 @@
         <p:nvGraphicFramePr>
           <p:cNvPr id="4" name="Table 3"/>
           <p:cNvGraphicFramePr/>
-          <p:nvPr/>
+          <p:nvPr>
+            <p:extLst>
+              <p:ext uri="{D42A27DB-BD31-4B8C-83A1-F6EECF244321}">
+                <p14:modId xmlns:p14="http://schemas.microsoft.com/office/powerpoint/2010/main" val="3274983976"/>
+              </p:ext>
+            </p:extLst>
+          </p:nvPr>
         </p:nvGraphicFramePr>
         <p:xfrm>
           <a:off x="571500" y="1495425"/>
@@ -4893,7 +4904,7 @@
                     <a:lstStyle/>
                     <a:p>
                       <a:r>
-                        <a:rPr sz="1875" b="1">
+                        <a:rPr sz="1875" b="1" dirty="0">
                           <a:solidFill>
                             <a:srgbClr val="FFFFFF"/>
                           </a:solidFill>
@@ -4996,7 +5007,7 @@
                     <a:lstStyle/>
                     <a:p>
                       <a:r>
-                        <a:rPr sz="1875" b="0">
+                        <a:rPr sz="1875" b="0" dirty="0">
                           <a:solidFill>
                             <a:srgbClr val="111827"/>
                           </a:solidFill>
@@ -5209,7 +5220,7 @@
                     <a:lstStyle/>
                     <a:p>
                       <a:r>
-                        <a:rPr sz="1875" b="1">
+                        <a:rPr sz="1875" b="1" dirty="0">
                           <a:solidFill>
                             <a:srgbClr val="111827"/>
                           </a:solidFill>
@@ -5257,7 +5268,7 @@
                     <a:lstStyle/>
                     <a:p>
                       <a:r>
-                        <a:rPr sz="1875" b="0">
+                        <a:rPr sz="1875" b="0" dirty="0">
                           <a:solidFill>
                             <a:srgbClr val="111827"/>
                           </a:solidFill>
@@ -5371,7 +5382,7 @@
               </a:defRPr>
             </a:pPr>
             <a:r>
-              <a:rPr sz="3525" b="1">
+              <a:rPr sz="3525" b="1" dirty="0">
                 <a:solidFill>
                   <a:srgbClr val="111827"/>
                 </a:solidFill>
@@ -5482,7 +5493,7 @@
                     <a:lstStyle/>
                     <a:p>
                       <a:r>
-                        <a:rPr sz="1875" b="1">
+                        <a:rPr sz="1875" b="1" dirty="0">
                           <a:solidFill>
                             <a:srgbClr val="FFFFFF"/>
                           </a:solidFill>
@@ -5537,7 +5548,7 @@
                     <a:lstStyle/>
                     <a:p>
                       <a:r>
-                        <a:rPr sz="1875" b="1">
+                        <a:rPr sz="1875" b="1" dirty="0">
                           <a:solidFill>
                             <a:srgbClr val="111827"/>
                           </a:solidFill>
@@ -5726,7 +5737,7 @@
                     <a:lstStyle/>
                     <a:p>
                       <a:r>
-                        <a:rPr sz="1875" b="0">
+                        <a:rPr sz="1875" b="0" dirty="0">
                           <a:solidFill>
                             <a:srgbClr val="111827"/>
                           </a:solidFill>
@@ -6549,7 +6560,7 @@
               </a:defRPr>
             </a:pPr>
             <a:r>
-              <a:rPr sz="3525" b="1">
+              <a:rPr sz="3525" b="1" dirty="0">
                 <a:solidFill>
                   <a:srgbClr val="111827"/>
                 </a:solidFill>
@@ -6732,7 +6743,7 @@
               </a:defRPr>
             </a:pPr>
             <a:r>
-              <a:rPr sz="2100" b="0">
+              <a:rPr sz="2100" b="0" dirty="0">
                 <a:solidFill>
                   <a:srgbClr val="111827"/>
                 </a:solidFill>
@@ -7280,7 +7291,7 @@
               </a:defRPr>
             </a:pPr>
             <a:r>
-              <a:rPr sz="1875" b="0">
+              <a:rPr sz="1875" b="0" dirty="0">
                 <a:solidFill>
                   <a:srgbClr val="111827"/>
                 </a:solidFill>
@@ -7684,7 +7695,7 @@
               </a:defRPr>
             </a:pPr>
             <a:r>
-              <a:rPr sz="3525" b="1">
+              <a:rPr sz="3525" b="1" dirty="0">
                 <a:solidFill>
                   <a:srgbClr val="111827"/>
                 </a:solidFill>
@@ -7867,7 +7878,7 @@
               </a:defRPr>
             </a:pPr>
             <a:r>
-              <a:rPr sz="2100" b="0">
+              <a:rPr sz="2100" b="0" dirty="0">
                 <a:solidFill>
                   <a:srgbClr val="111827"/>
                 </a:solidFill>
@@ -8332,7 +8343,7 @@
               </a:defRPr>
             </a:pPr>
             <a:r>
-              <a:rPr sz="3525" b="1">
+              <a:rPr sz="3525" b="1" dirty="0">
                 <a:solidFill>
                   <a:srgbClr val="111827"/>
                 </a:solidFill>
@@ -8663,7 +8674,7 @@
               </a:defRPr>
             </a:pPr>
             <a:r>
-              <a:rPr sz="3525" b="1">
+              <a:rPr sz="3525" b="1" dirty="0">
                 <a:solidFill>
                   <a:srgbClr val="111827"/>
                 </a:solidFill>
@@ -9250,7 +9261,7 @@
               </a:defRPr>
             </a:pPr>
             <a:r>
-              <a:rPr sz="3525" b="1">
+              <a:rPr sz="3525" b="1" dirty="0">
                 <a:solidFill>
                   <a:srgbClr val="111827"/>
                 </a:solidFill>
@@ -9991,7 +10002,7 @@
               </a:defRPr>
             </a:pPr>
             <a:r>
-              <a:rPr sz="3525" b="1">
+              <a:rPr sz="3525" b="1" dirty="0">
                 <a:solidFill>
                   <a:srgbClr val="111827"/>
                 </a:solidFill>
@@ -11163,7 +11174,7 @@
               </a:defRPr>
             </a:pPr>
             <a:r>
-              <a:rPr sz="3525" b="1">
+              <a:rPr sz="3525" b="1" dirty="0">
                 <a:solidFill>
                   <a:srgbClr val="111827"/>
                 </a:solidFill>
@@ -11975,7 +11986,7 @@
               </a:defRPr>
             </a:pPr>
             <a:r>
-              <a:rPr sz="3525" b="1">
+              <a:rPr sz="3525" b="1" dirty="0">
                 <a:solidFill>
                   <a:srgbClr val="111827"/>
                 </a:solidFill>
@@ -12787,7 +12798,7 @@
               </a:defRPr>
             </a:pPr>
             <a:r>
-              <a:rPr sz="3525" b="1">
+              <a:rPr sz="3525" b="1" dirty="0">
                 <a:solidFill>
                   <a:srgbClr val="111827"/>
                 </a:solidFill>
@@ -13545,7 +13556,7 @@
               </a:defRPr>
             </a:pPr>
             <a:r>
-              <a:rPr sz="3525" b="1">
+              <a:rPr sz="3525" b="1" dirty="0">
                 <a:solidFill>
                   <a:srgbClr val="111827"/>
                 </a:solidFill>
@@ -14276,7 +14287,7 @@
               </a:defRPr>
             </a:pPr>
             <a:r>
-              <a:rPr sz="3525" b="1">
+              <a:rPr sz="3525" b="1" dirty="0">
                 <a:solidFill>
                   <a:srgbClr val="111827"/>
                 </a:solidFill>
@@ -14861,7 +14872,7 @@
               </a:defRPr>
             </a:pPr>
             <a:r>
-              <a:rPr sz="3525" b="1">
+              <a:rPr sz="3525" b="1" dirty="0">
                 <a:solidFill>
                   <a:srgbClr val="111827"/>
                 </a:solidFill>
@@ -15629,7 +15640,7 @@
               </a:defRPr>
             </a:pPr>
             <a:r>
-              <a:rPr sz="3525" b="1">
+              <a:rPr lang="en-US" sz="3525" b="1" dirty="0">
                 <a:solidFill>
                   <a:srgbClr val="111827"/>
                 </a:solidFill>
@@ -15639,6 +15650,14 @@
               </a:rPr>
               <a:t>Package managers</a:t>
             </a:r>
+            <a:endParaRPr sz="3525" b="1" dirty="0">
+              <a:solidFill>
+                <a:srgbClr val="111827"/>
+              </a:solidFill>
+              <a:latin typeface="Arial"/>
+              <a:ea typeface="Arial"/>
+              <a:cs typeface="Arial"/>
+            </a:endParaRPr>
           </a:p>
         </p:txBody>
       </p:sp>
@@ -16277,7 +16296,7 @@
               </a:defRPr>
             </a:pPr>
             <a:r>
-              <a:rPr sz="3525" b="1">
+              <a:rPr sz="3525" b="1" dirty="0">
                 <a:solidFill>
                   <a:srgbClr val="111827"/>
                 </a:solidFill>
